--- a/curso_es/pptx/S77.pptx
+++ b/curso_es/pptx/S77.pptx
@@ -3800,7 +3800,7 @@
                 </a:solidFill>
                 <a:latin typeface="Nunito Sans"/>
               </a:rPr>
-              <a:t>Enfadada, Naiara escribe en privado a Yasmin: «Leire es una pesada». Yasmin hace una captura y la sube al grupo de clase.</a:t>
+              <a:t>Enfadada, una chica escribe en privado a una amiga: «Una compañera es una pesada». La amiga hace una captura y la sube al chat del equipo de balonmano.</a:t>
             </a:r>
           </a:p>
         </p:txBody>
@@ -3848,7 +3848,7 @@
                 </a:solidFill>
                 <a:latin typeface="Nunito Sans"/>
               </a:rPr>
-              <a:t>Naiara escribió en caliente (sesión 75), pero en privado.</a:t>
+              <a:t>La chica escribió en caliente (sesión 75), pero en privado.</a:t>
             </a:r>
           </a:p>
           <a:p>
@@ -3873,7 +3873,7 @@
                 </a:solidFill>
                 <a:latin typeface="Nunito Sans"/>
               </a:rPr>
-              <a:t>Yasmin ha roto la privacidad de Naiara: el mensaje era para ella sola.</a:t>
+              <a:t>La amiga ha roto la privacidad de la chica: el mensaje era para ella sola.</a:t>
             </a:r>
           </a:p>
           <a:p>
@@ -3898,7 +3898,7 @@
                 </a:solidFill>
                 <a:latin typeface="Nunito Sans"/>
               </a:rPr>
-              <a:t>Ahora lo lee toda la clase, Leire incluida. Sin cara, sin tono y guardado: el conflicto crece.</a:t>
+              <a:t>Ahora lo lee toda la clase, incluida la compañera de la que hablaba. Sin cara, sin tono y guardado: el conflicto crece.</a:t>
             </a:r>
           </a:p>
           <a:p>
@@ -4109,7 +4109,7 @@
                 </a:solidFill>
                 <a:latin typeface="Nunito Sans"/>
               </a:rPr>
-              <a:t>Una cuenta sin foto ni nombre comenta cada foto de Omar: «Qué pintas», «Nadie te aguanta». Lleva así tres semanas.</a:t>
+              <a:t>Una cuenta sin foto ni nombre comenta cada foto de un chico: «Qué pintas», «Nadie te aguanta». Lleva así tres semanas.</a:t>
             </a:r>
           </a:p>
         </p:txBody>
@@ -4182,7 +4182,7 @@
                 </a:solidFill>
                 <a:latin typeface="Nunito Sans"/>
               </a:rPr>
-              <a:t>¿Repetición? Sí: tres semanas. ¿Desequilibrio? Sí: Omar no sabe quién es.</a:t>
+              <a:t>¿Repetición? Sí: tres semanas. ¿Desequilibrio? Sí: el chico no sabe quién es.</a:t>
             </a:r>
           </a:p>
           <a:p>
@@ -4207,7 +4207,7 @@
                 </a:solidFill>
                 <a:latin typeface="Nunito Sans"/>
               </a:rPr>
-              <a:t>Es ciberacoso. Omar no debe contestar en caliente: guarda capturas, bloquea y lo denuncia.</a:t>
+              <a:t>Es ciberacoso. Ese chico no debe contestar en caliente: guarda capturas, bloquea y lo denuncia.</a:t>
             </a:r>
           </a:p>
           <a:p>
@@ -4418,7 +4418,7 @@
                 </a:solidFill>
                 <a:latin typeface="Nunito Sans"/>
               </a:rPr>
-              <a:t>Dylan graba a Chen tropezando en el patio, le pone música graciosa y lo sube. Muchos se ríen. Dylan dice: «Solo era una broma».</a:t>
+              <a:t>Un chico graba a otro fallando un tiro en el partido, le pone música graciosa y lo sube. Muchos se ríen. El primero dice: «Solo era una broma».</a:t>
             </a:r>
           </a:p>
         </p:txBody>
@@ -4466,7 +4466,7 @@
                 </a:solidFill>
                 <a:latin typeface="Nunito Sans"/>
               </a:rPr>
-              <a:t>Si Dylan lo hizo de broma, ¿no pasa nada?</a:t>
+              <a:t>Si lo hizo de broma, ¿no pasa nada?</a:t>
             </a:r>
           </a:p>
           <a:p>
@@ -4491,7 +4491,7 @@
                 </a:solidFill>
                 <a:latin typeface="Nunito Sans"/>
               </a:rPr>
-              <a:t>Parece que no: Dylan no quería hacer daño y la gente se ríe.</a:t>
+              <a:t>Parece que no: no quería hacer daño y la gente se ríe.</a:t>
             </a:r>
           </a:p>
           <a:p>
@@ -4516,7 +4516,7 @@
                 </a:solidFill>
                 <a:latin typeface="Nunito Sans"/>
               </a:rPr>
-              <a:t>Pero ¿se ríe Chen? ¿Dio permiso? Su imagen es suya.</a:t>
+              <a:t>Pero ¿se ríe el otro? ¿Dio permiso? Su imagen es suya.</a:t>
             </a:r>
           </a:p>
           <a:p>
@@ -4566,7 +4566,7 @@
                 </a:solidFill>
                 <a:latin typeface="Nunito Sans"/>
               </a:rPr>
-              <a:t>Conclusión: la intención no borra el daño. Sin permiso, subir el vídeo no respeta a Chen.</a:t>
+              <a:t>Conclusión: la intención no borra el daño. Sin permiso, subir el vídeo no respeta al otro.</a:t>
             </a:r>
           </a:p>
         </p:txBody>
@@ -6493,7 +6493,7 @@
                 </a:solidFill>
                 <a:latin typeface="Nunito Sans"/>
               </a:rPr>
-              <a:t>Alguien hace una captura de un audio privado de Maialen y la sube al grupo de clase. En diez minutos la han visto sesenta personas.</a:t>
+              <a:t>Alguien hace una captura de un audio privado de una chica y la sube al chat del equipo de balonmano. En diez minutos la han visto sesenta personas.</a:t>
             </a:r>
           </a:p>
         </p:txBody>
